--- a/output/20260624/20260624_성 요한 세례자 탄생 대축일.pptx
+++ b/output/20260624/20260624_성 요한 세례자 탄생 대축일.pptx
@@ -25593,7 +25593,7 @@
         </p:nvSpPr>
         <p:spPr>
           <a:xfrm>
-            <a:off x="323528" y="1625058"/>
+            <a:off x="323528" y="1383030"/>
             <a:ext cx="5421432" cy="1246495"/>
           </a:xfrm>
           <a:prstGeom prst="rect">
@@ -25923,7 +25923,7 @@
         </p:nvSpPr>
         <p:spPr>
           <a:xfrm>
-            <a:off x="323528" y="2844133"/>
+            <a:off x="323528" y="2303968"/>
             <a:ext cx="5421432" cy="1246495"/>
           </a:xfrm>
           <a:prstGeom prst="rect">
@@ -33223,7 +33223,7 @@
         </p:nvSpPr>
         <p:spPr>
           <a:xfrm>
-            <a:off x="323528" y="3416377"/>
+            <a:off x="323528" y="3278540"/>
             <a:ext cx="5421432" cy="1246495"/>
           </a:xfrm>
           <a:prstGeom prst="rect">

--- a/output/20260624/20260624_성 요한 세례자 탄생 대축일.pptx
+++ b/output/20260624/20260624_성 요한 세례자 탄생 대축일.pptx
@@ -23908,7 +23908,7 @@
 </file>
 
 <file path=ppt/slides/slide22.xml><?xml version="1.0" encoding="utf-8"?>
-<p:sld xmlns:a="http://schemas.openxmlformats.org/drawingml/2006/main" xmlns:p="http://schemas.openxmlformats.org/presentationml/2006/main" xmlns:r="http://schemas.openxmlformats.org/officeDocument/2006/relationships">
+<p:sld xmlns:a="http://schemas.openxmlformats.org/drawingml/2006/main" xmlns:p="http://schemas.openxmlformats.org/presentationml/2006/main" xmlns:r="http://schemas.openxmlformats.org/officeDocument/2006/relationships" showMasterSp="0">
   <p:cSld>
     <p:bg>
       <p:bgPr>
@@ -25720,7 +25720,7 @@
 </file>
 
 <file path=ppt/slides/slide33.xml><?xml version="1.0" encoding="utf-8"?>
-<p:sld xmlns:a="http://schemas.openxmlformats.org/drawingml/2006/main" xmlns:p="http://schemas.openxmlformats.org/presentationml/2006/main" xmlns:r="http://schemas.openxmlformats.org/officeDocument/2006/relationships">
+<p:sld xmlns:a="http://schemas.openxmlformats.org/drawingml/2006/main" xmlns:p="http://schemas.openxmlformats.org/presentationml/2006/main" xmlns:r="http://schemas.openxmlformats.org/officeDocument/2006/relationships" showMasterSp="0">
   <p:cSld>
     <p:bg>
       <p:bgPr>
@@ -26187,7 +26187,7 @@
 </file>
 
 <file path=ppt/slides/slide34.xml><?xml version="1.0" encoding="utf-8"?>
-<p:sld xmlns:a="http://schemas.openxmlformats.org/drawingml/2006/main" xmlns:p="http://schemas.openxmlformats.org/presentationml/2006/main" xmlns:r="http://schemas.openxmlformats.org/officeDocument/2006/relationships">
+<p:sld xmlns:a="http://schemas.openxmlformats.org/drawingml/2006/main" xmlns:p="http://schemas.openxmlformats.org/presentationml/2006/main" xmlns:r="http://schemas.openxmlformats.org/officeDocument/2006/relationships" showMasterSp="0">
   <p:cSld>
     <p:bg>
       <p:bgPr>
@@ -33408,7 +33408,7 @@
 </file>
 
 <file path=ppt/slides/slide69.xml><?xml version="1.0" encoding="utf-8"?>
-<p:sld xmlns:a="http://schemas.openxmlformats.org/drawingml/2006/main" xmlns:p="http://schemas.openxmlformats.org/presentationml/2006/main" xmlns:r="http://schemas.openxmlformats.org/officeDocument/2006/relationships">
+<p:sld xmlns:a="http://schemas.openxmlformats.org/drawingml/2006/main" xmlns:p="http://schemas.openxmlformats.org/presentationml/2006/main" xmlns:r="http://schemas.openxmlformats.org/officeDocument/2006/relationships" showMasterSp="0">
   <p:cSld>
     <p:bg>
       <p:bgPr>
@@ -34237,7 +34237,7 @@
 </file>
 
 <file path=ppt/slides/slide70.xml><?xml version="1.0" encoding="utf-8"?>
-<p:sld xmlns:a="http://schemas.openxmlformats.org/drawingml/2006/main" xmlns:p="http://schemas.openxmlformats.org/presentationml/2006/main" xmlns:r="http://schemas.openxmlformats.org/officeDocument/2006/relationships">
+<p:sld xmlns:a="http://schemas.openxmlformats.org/drawingml/2006/main" xmlns:p="http://schemas.openxmlformats.org/presentationml/2006/main" xmlns:r="http://schemas.openxmlformats.org/officeDocument/2006/relationships" showMasterSp="0">
   <p:cSld>
     <p:bg>
       <p:bgPr>

--- a/output/20260624/20260624_성 요한 세례자 탄생 대축일.pptx
+++ b/output/20260624/20260624_성 요한 세례자 탄생 대축일.pptx
@@ -32,11 +32,11 @@
     <p:sldId id="2016" r:id="rId23"/>
     <p:sldId id="2522" r:id="rId24"/>
     <p:sldId id="2523" r:id="rId25"/>
+    <p:sldId id="2060" r:id="rId26"/>
+    <p:sldId id="1520" r:id="rId27"/>
     <p:sldId id="2536" r:id="rId77"/>
-    <p:sldId id="1520" r:id="rId27"/>
-    <p:sldId id="2537" r:id="rId26"/>
-    <p:sldId id="2538" r:id="rId78"/>
-    <p:sldId id="2539" r:id="rId79"/>
+    <p:sldId id="2537" r:id="rId78"/>
+    <p:sldId id="2538" r:id="rId79"/>
     <p:sldId id="1505" r:id="rId32"/>
     <p:sldId id="2081" r:id="rId33"/>
     <p:sldId id="2083" r:id="rId34"/>
@@ -48,8 +48,8 @@
     <p:sldId id="344" r:id="rId42"/>
     <p:sldId id="2070" r:id="rId43"/>
     <p:sldId id="2530" r:id="rId44"/>
-    <p:sldId id="2540" r:id="rId38"/>
-    <p:sldId id="2541" r:id="rId37"/>
+    <p:sldId id="2539" r:id="rId38"/>
+    <p:sldId id="2540" r:id="rId37"/>
     <p:sldId id="2086" r:id="rId46"/>
     <p:sldId id="2087" r:id="rId47"/>
     <p:sldId id="2088" r:id="rId48"/>
@@ -1460,6 +1460,160 @@
     <p:extLst>
       <p:ext uri="{BB962C8B-B14F-4D97-AF65-F5344CB8AC3E}">
         <p14:creationId xmlns:p14="http://schemas.microsoft.com/office/powerpoint/2010/main" xmlns="" val="3511435542"/>
+      </p:ext>
+    </p:extLst>
+  </p:cSld>
+  <p:clrMapOvr>
+    <a:masterClrMapping/>
+  </p:clrMapOvr>
+</p:notes>
+</file>
+
+<file path=ppt/notesSlides/notesSlide16.xml><?xml version="1.0" encoding="utf-8"?>
+<p:notes xmlns:a="http://schemas.openxmlformats.org/drawingml/2006/main" xmlns:r="http://schemas.openxmlformats.org/officeDocument/2006/relationships" xmlns:p="http://schemas.openxmlformats.org/presentationml/2006/main">
+  <p:cSld>
+    <p:spTree>
+      <p:nvGrpSpPr>
+        <p:cNvPr id="1" name=""/>
+        <p:cNvGrpSpPr/>
+        <p:nvPr/>
+      </p:nvGrpSpPr>
+      <p:grpSpPr>
+        <a:xfrm>
+          <a:off x="0" y="0"/>
+          <a:ext cx="0" cy="0"/>
+          <a:chOff x="0" y="0"/>
+          <a:chExt cx="0" cy="0"/>
+        </a:xfrm>
+      </p:grpSpPr>
+      <p:sp>
+        <p:nvSpPr>
+          <p:cNvPr id="2" name="Slide Image Placeholder 1"/>
+          <p:cNvSpPr>
+            <a:spLocks noGrp="1" noRot="1" noChangeAspect="1"/>
+          </p:cNvSpPr>
+          <p:nvPr>
+            <p:ph type="sldImg"/>
+          </p:nvPr>
+        </p:nvSpPr>
+        <p:spPr/>
+      </p:sp>
+      <p:sp>
+        <p:nvSpPr>
+          <p:cNvPr id="3" name="Notes Placeholder 2"/>
+          <p:cNvSpPr>
+            <a:spLocks noGrp="1"/>
+          </p:cNvSpPr>
+          <p:nvPr>
+            <p:ph type="body" idx="1"/>
+          </p:nvPr>
+        </p:nvSpPr>
+        <p:spPr/>
+        <p:txBody>
+          <a:bodyPr>
+            <a:normAutofit/>
+          </a:bodyPr>
+          <a:lstStyle/>
+          <a:p>
+            <a:endParaRPr lang="en-AU" sz="900" kern="1200" dirty="0">
+              <a:solidFill>
+                <a:schemeClr val="tx1"/>
+              </a:solidFill>
+              <a:effectLst/>
+              <a:latin typeface="+mn-lt"/>
+              <a:ea typeface="+mn-ea"/>
+              <a:cs typeface="+mn-cs"/>
+            </a:endParaRPr>
+          </a:p>
+        </p:txBody>
+      </p:sp>
+      <p:sp>
+        <p:nvSpPr>
+          <p:cNvPr id="4" name="Slide Number Placeholder 3"/>
+          <p:cNvSpPr>
+            <a:spLocks noGrp="1"/>
+          </p:cNvSpPr>
+          <p:nvPr>
+            <p:ph type="sldNum" sz="quarter" idx="10"/>
+          </p:nvPr>
+        </p:nvSpPr>
+        <p:spPr/>
+        <p:txBody>
+          <a:bodyPr/>
+          <a:lstStyle/>
+          <a:p>
+            <a:pPr marL="0" marR="0" lvl="0" indent="0" algn="r" defTabSz="715558" rtl="0" eaLnBrk="1" fontAlgn="auto" latinLnBrk="0" hangingPunct="1">
+              <a:lnSpc>
+                <a:spcPct val="100000"/>
+              </a:lnSpc>
+              <a:spcBef>
+                <a:spcPts val="0"/>
+              </a:spcBef>
+              <a:spcAft>
+                <a:spcPts val="0"/>
+              </a:spcAft>
+              <a:buClrTx/>
+              <a:buSzTx/>
+              <a:buFontTx/>
+              <a:buNone/>
+              <a:tabLst/>
+              <a:defRPr/>
+            </a:pPr>
+            <a:fld id="{20B3FD64-BF31-4C61-B552-27E91C04657E}" type="slidenum">
+              <a:rPr kumimoji="0" lang="en-AU" sz="1200" b="0" i="0" u="none" strike="noStrike" kern="1200" cap="none" spc="0" normalizeH="0" baseline="0" noProof="0" smtClean="0">
+                <a:ln>
+                  <a:noFill/>
+                </a:ln>
+                <a:solidFill>
+                  <a:prstClr val="black"/>
+                </a:solidFill>
+                <a:effectLst/>
+                <a:uLnTx/>
+                <a:uFillTx/>
+                <a:latin typeface="Calibri"/>
+                <a:ea typeface="+mn-ea"/>
+                <a:cs typeface="+mn-cs"/>
+              </a:rPr>
+              <a:pPr marL="0" marR="0" lvl="0" indent="0" algn="r" defTabSz="715558" rtl="0" eaLnBrk="1" fontAlgn="auto" latinLnBrk="0" hangingPunct="1">
+                <a:lnSpc>
+                  <a:spcPct val="100000"/>
+                </a:lnSpc>
+                <a:spcBef>
+                  <a:spcPts val="0"/>
+                </a:spcBef>
+                <a:spcAft>
+                  <a:spcPts val="0"/>
+                </a:spcAft>
+                <a:buClrTx/>
+                <a:buSzTx/>
+                <a:buFontTx/>
+                <a:buNone/>
+                <a:tabLst/>
+                <a:defRPr/>
+              </a:pPr>
+              <a:t>22</a:t>
+            </a:fld>
+            <a:endParaRPr kumimoji="0" lang="en-AU" sz="1200" b="0" i="0" u="none" strike="noStrike" kern="1200" cap="none" spc="0" normalizeH="0" baseline="0" noProof="0" dirty="0">
+              <a:ln>
+                <a:noFill/>
+              </a:ln>
+              <a:solidFill>
+                <a:prstClr val="black"/>
+              </a:solidFill>
+              <a:effectLst/>
+              <a:uLnTx/>
+              <a:uFillTx/>
+              <a:latin typeface="Calibri"/>
+              <a:ea typeface="+mn-ea"/>
+              <a:cs typeface="+mn-cs"/>
+            </a:endParaRPr>
+          </a:p>
+        </p:txBody>
+      </p:sp>
+    </p:spTree>
+    <p:extLst>
+      <p:ext uri="{BB962C8B-B14F-4D97-AF65-F5344CB8AC3E}">
+        <p14:creationId xmlns:p14="http://schemas.microsoft.com/office/powerpoint/2010/main" xmlns="" val="2087383619"/>
       </p:ext>
     </p:extLst>
   </p:cSld>
@@ -20201,7 +20355,7 @@
           <a:p>
             <a:pPr marL="720000" indent="-720000">
               <a:lnSpc>
-                <a:spcPct val="135000"/>
+                <a:spcPct val="100000"/>
               </a:lnSpc>
               <a:spcAft>
                 <a:spcPts val="1200"/>
@@ -23664,6 +23818,56 @@
               <a:t>보상은 나의 하느님께 있다.”</a:t>
             </a:r>
           </a:p>
+          <a:p>
+            <a:pPr lvl="0" defTabSz="914400">
+              <a:lnSpc>
+                <a:spcPct val="110000"/>
+              </a:lnSpc>
+              <a:spcAft>
+                <a:spcPts val="600"/>
+              </a:spcAft>
+            </a:pPr>
+            <a:r>
+              <a:rPr lang="en-US" altLang="ko-KR" sz="3200" b="1" dirty="0" smtClean="0">
+                <a:solidFill>
+                  <a:srgbClr val="FFC000"/>
+                </a:solidFill>
+                <a:latin typeface="바탕" panose="02030600000101010101" pitchFamily="18" charset="-127"/>
+                <a:ea typeface="바탕" panose="02030600000101010101" pitchFamily="18" charset="-127"/>
+              </a:rPr>
+              <a:t>5 </a:t>
+            </a:r>
+            <a:r>
+              <a:rPr lang="en-US" altLang="ko-KR" sz="3200" b="1" dirty="0" smtClean="0">
+                <a:solidFill>
+                  <a:schemeClr val="bg1"/>
+                </a:solidFill>
+                <a:latin typeface="바탕" panose="02030600000101010101" pitchFamily="18" charset="-127"/>
+                <a:ea typeface="바탕" panose="02030600000101010101" pitchFamily="18" charset="-127"/>
+              </a:rPr>
+              <a:t>이제 주님께서 말씀하신다. 그분께서는 야곱을</a:t>
+            </a:r>
+            <a:r>
+              <a:rPr lang="en-US" altLang="ko-KR" sz="3200" b="1" dirty="0" smtClean="0">
+                <a:solidFill>
+                  <a:schemeClr val="bg1"/>
+                </a:solidFill>
+                <a:latin typeface="바탕" panose="02030600000101010101" pitchFamily="18" charset="-127"/>
+                <a:ea typeface="바탕" panose="02030600000101010101" pitchFamily="18" charset="-127"/>
+              </a:rPr>
+              <a:t> </a:t>
+            </a:r>
+            <a:r>
+              <a:rPr lang="en-US" altLang="ko-KR" sz="3200" b="1" dirty="0" smtClean="0">
+                <a:solidFill>
+                  <a:schemeClr val="bg1"/>
+                </a:solidFill>
+                <a:latin typeface="바탕" panose="02030600000101010101" pitchFamily="18" charset="-127"/>
+                <a:ea typeface="바탕" panose="02030600000101010101" pitchFamily="18" charset="-127"/>
+              </a:rPr>
+              <a:t>당신께 돌아오게 하시고 이스라엘이 당신께</a:t>
+            </a:r>
+          </a:p>
         </p:txBody>
       </p:sp>
     </p:spTree>
@@ -23787,12 +23991,12 @@
             <a:r>
               <a:rPr lang="en-US" altLang="ko-KR" sz="3200" b="1" dirty="0" smtClean="0">
                 <a:solidFill>
-                  <a:srgbClr val="FFC000"/>
+                  <a:schemeClr val="bg1"/>
                 </a:solidFill>
                 <a:latin typeface="바탕" panose="02030600000101010101" pitchFamily="18" charset="-127"/>
                 <a:ea typeface="바탕" panose="02030600000101010101" pitchFamily="18" charset="-127"/>
               </a:rPr>
-              <a:t>5 </a:t>
+              <a:t>모여들게</a:t>
             </a:r>
             <a:r>
               <a:rPr lang="en-US" altLang="ko-KR" sz="3200" b="1" dirty="0" smtClean="0">
@@ -23802,7 +24006,7 @@
                 <a:latin typeface="바탕" panose="02030600000101010101" pitchFamily="18" charset="-127"/>
                 <a:ea typeface="바탕" panose="02030600000101010101" pitchFamily="18" charset="-127"/>
               </a:rPr>
-              <a:t>이제 주님께서 말씀하신다. 그분께서는 야곱을</a:t>
+              <a:t> </a:t>
             </a:r>
             <a:r>
               <a:rPr lang="en-US" altLang="ko-KR" sz="3200" b="1" dirty="0" smtClean="0">
@@ -23812,7 +24016,7 @@
                 <a:latin typeface="바탕" panose="02030600000101010101" pitchFamily="18" charset="-127"/>
                 <a:ea typeface="바탕" panose="02030600000101010101" pitchFamily="18" charset="-127"/>
               </a:rPr>
-              <a:t> </a:t>
+              <a:t>하시려고 나를 모태에서부터 당신 종으로 빚어</a:t>
             </a:r>
             <a:r>
               <a:rPr lang="en-US" altLang="ko-KR" sz="3200" b="1" dirty="0" smtClean="0">
@@ -23822,7 +24026,7 @@
                 <a:latin typeface="바탕" panose="02030600000101010101" pitchFamily="18" charset="-127"/>
                 <a:ea typeface="바탕" panose="02030600000101010101" pitchFamily="18" charset="-127"/>
               </a:rPr>
-              <a:t>당신께 돌아오게 하시고 이스라엘이 당신께 모여들게</a:t>
+              <a:t> </a:t>
             </a:r>
             <a:r>
               <a:rPr lang="en-US" altLang="ko-KR" sz="3200" b="1" dirty="0" smtClean="0">
@@ -23832,7 +24036,7 @@
                 <a:latin typeface="바탕" panose="02030600000101010101" pitchFamily="18" charset="-127"/>
                 <a:ea typeface="바탕" panose="02030600000101010101" pitchFamily="18" charset="-127"/>
               </a:rPr>
-              <a:t> </a:t>
+              <a:t>만드셨다. 나는 주님의 눈에 소중하게 여겨졌고</a:t>
             </a:r>
             <a:r>
               <a:rPr lang="en-US" altLang="ko-KR" sz="3200" b="1" dirty="0" smtClean="0">
@@ -23842,7 +24046,7 @@
                 <a:latin typeface="바탕" panose="02030600000101010101" pitchFamily="18" charset="-127"/>
                 <a:ea typeface="바탕" panose="02030600000101010101" pitchFamily="18" charset="-127"/>
               </a:rPr>
-              <a:t>하시려고 나를 모태에서부터 당신 종으로 빚어</a:t>
+              <a:t> </a:t>
             </a:r>
             <a:r>
               <a:rPr lang="en-US" altLang="ko-KR" sz="3200" b="1" dirty="0" smtClean="0">
@@ -23852,17 +24056,27 @@
                 <a:latin typeface="바탕" panose="02030600000101010101" pitchFamily="18" charset="-127"/>
                 <a:ea typeface="바탕" panose="02030600000101010101" pitchFamily="18" charset="-127"/>
               </a:rPr>
-              <a:t> </a:t>
-            </a:r>
+              <a:t>나의 하느님께서 나의 힘이 되어 주셨다.</a:t>
+            </a:r>
+          </a:p>
+          <a:p>
+            <a:pPr lvl="0" defTabSz="914400">
+              <a:lnSpc>
+                <a:spcPct val="110000"/>
+              </a:lnSpc>
+              <a:spcAft>
+                <a:spcPts val="600"/>
+              </a:spcAft>
+            </a:pPr>
             <a:r>
               <a:rPr lang="en-US" altLang="ko-KR" sz="3200" b="1" dirty="0" smtClean="0">
                 <a:solidFill>
-                  <a:schemeClr val="bg1"/>
+                  <a:srgbClr val="FFC000"/>
                 </a:solidFill>
                 <a:latin typeface="바탕" panose="02030600000101010101" pitchFamily="18" charset="-127"/>
                 <a:ea typeface="바탕" panose="02030600000101010101" pitchFamily="18" charset="-127"/>
               </a:rPr>
-              <a:t>만드셨다. 나는 주님의 눈에 소중하게 여겨졌고</a:t>
+              <a:t>6 </a:t>
             </a:r>
             <a:r>
               <a:rPr lang="en-US" altLang="ko-KR" sz="3200" b="1" dirty="0" smtClean="0">
@@ -23872,7 +24086,7 @@
                 <a:latin typeface="바탕" panose="02030600000101010101" pitchFamily="18" charset="-127"/>
                 <a:ea typeface="바탕" panose="02030600000101010101" pitchFamily="18" charset="-127"/>
               </a:rPr>
-              <a:t> </a:t>
+              <a:t>그분께서 말씀하신다. “네가 나의 종이 되어</a:t>
             </a:r>
             <a:r>
               <a:rPr lang="en-US" altLang="ko-KR" sz="3200" b="1" dirty="0" smtClean="0">
@@ -23882,7 +24096,77 @@
                 <a:latin typeface="바탕" panose="02030600000101010101" pitchFamily="18" charset="-127"/>
                 <a:ea typeface="바탕" panose="02030600000101010101" pitchFamily="18" charset="-127"/>
               </a:rPr>
-              <a:t>나의 하느님께서 나의 힘이 되어 주셨다.</a:t>
+              <a:t> </a:t>
+            </a:r>
+            <a:r>
+              <a:rPr lang="en-US" altLang="ko-KR" sz="3200" b="1" dirty="0" smtClean="0">
+                <a:solidFill>
+                  <a:schemeClr val="bg1"/>
+                </a:solidFill>
+                <a:latin typeface="바탕" panose="02030600000101010101" pitchFamily="18" charset="-127"/>
+                <a:ea typeface="바탕" panose="02030600000101010101" pitchFamily="18" charset="-127"/>
+              </a:rPr>
+              <a:t>야곱의 지파들을 다시 일으키고 이스라엘의</a:t>
+            </a:r>
+            <a:r>
+              <a:rPr lang="en-US" altLang="ko-KR" sz="3200" b="1" dirty="0" smtClean="0">
+                <a:solidFill>
+                  <a:schemeClr val="bg1"/>
+                </a:solidFill>
+                <a:latin typeface="바탕" panose="02030600000101010101" pitchFamily="18" charset="-127"/>
+                <a:ea typeface="바탕" panose="02030600000101010101" pitchFamily="18" charset="-127"/>
+              </a:rPr>
+              <a:t> </a:t>
+            </a:r>
+            <a:r>
+              <a:rPr lang="en-US" altLang="ko-KR" sz="3200" b="1" dirty="0" smtClean="0">
+                <a:solidFill>
+                  <a:schemeClr val="bg1"/>
+                </a:solidFill>
+                <a:latin typeface="바탕" panose="02030600000101010101" pitchFamily="18" charset="-127"/>
+                <a:ea typeface="바탕" panose="02030600000101010101" pitchFamily="18" charset="-127"/>
+              </a:rPr>
+              <a:t>생존자들을 돌아오게 하는 것만으로는 충분하지</a:t>
+            </a:r>
+            <a:r>
+              <a:rPr lang="en-US" altLang="ko-KR" sz="3200" b="1" dirty="0" smtClean="0">
+                <a:solidFill>
+                  <a:schemeClr val="bg1"/>
+                </a:solidFill>
+                <a:latin typeface="바탕" panose="02030600000101010101" pitchFamily="18" charset="-127"/>
+                <a:ea typeface="바탕" panose="02030600000101010101" pitchFamily="18" charset="-127"/>
+              </a:rPr>
+              <a:t> </a:t>
+            </a:r>
+            <a:r>
+              <a:rPr lang="en-US" altLang="ko-KR" sz="3200" b="1" dirty="0" smtClean="0">
+                <a:solidFill>
+                  <a:schemeClr val="bg1"/>
+                </a:solidFill>
+                <a:latin typeface="바탕" panose="02030600000101010101" pitchFamily="18" charset="-127"/>
+                <a:ea typeface="바탕" panose="02030600000101010101" pitchFamily="18" charset="-127"/>
+              </a:rPr>
+              <a:t>않다. 나의 구원이 땅끝까지 다다르도록 나는 너를</a:t>
+            </a:r>
+            <a:r>
+              <a:rPr lang="en-US" altLang="ko-KR" sz="3200" b="1" dirty="0" smtClean="0">
+                <a:solidFill>
+                  <a:schemeClr val="bg1"/>
+                </a:solidFill>
+                <a:latin typeface="바탕" panose="02030600000101010101" pitchFamily="18" charset="-127"/>
+                <a:ea typeface="바탕" panose="02030600000101010101" pitchFamily="18" charset="-127"/>
+              </a:rPr>
+              <a:t> </a:t>
+            </a:r>
+            <a:r>
+              <a:rPr lang="en-US" altLang="ko-KR" sz="3200" b="1" dirty="0" smtClean="0">
+                <a:solidFill>
+                  <a:schemeClr val="bg1"/>
+                </a:solidFill>
+                <a:latin typeface="바탕" panose="02030600000101010101" pitchFamily="18" charset="-127"/>
+                <a:ea typeface="바탕" panose="02030600000101010101" pitchFamily="18" charset="-127"/>
+              </a:rPr>
+              <a:t>민족들의 빛으로 세운다.”</a:t>
             </a:r>
           </a:p>
         </p:txBody>
@@ -23908,55 +24192,75 @@
 </file>
 
 <file path=ppt/slides/slide22.xml><?xml version="1.0" encoding="utf-8"?>
-<p:sld xmlns:a="http://schemas.openxmlformats.org/drawingml/2006/main" xmlns:p="http://schemas.openxmlformats.org/presentationml/2006/main" xmlns:r="http://schemas.openxmlformats.org/officeDocument/2006/relationships" showMasterSp="0">
+<p:sld xmlns:a="http://schemas.openxmlformats.org/drawingml/2006/main" xmlns:r="http://schemas.openxmlformats.org/officeDocument/2006/relationships" xmlns:p="http://schemas.openxmlformats.org/presentationml/2006/main">
   <p:cSld>
-    <p:bg>
-      <p:bgPr>
-        <a:solidFill>
-          <a:srgbClr val="000000"/>
-        </a:solidFill>
-        <a:effectLst/>
-      </p:bgPr>
-    </p:bg>
     <p:spTree>
       <p:nvGrpSpPr>
         <p:cNvPr id="1" name=""/>
         <p:cNvGrpSpPr/>
         <p:nvPr/>
       </p:nvGrpSpPr>
-      <p:grpSpPr/>
-      <p:sp>
-        <p:nvSpPr>
-          <p:cNvPr id="9999" name="BlackBg"/>
-          <p:cNvSpPr>
-            <a:spLocks noGrp="1"/>
-          </p:cNvSpPr>
+      <p:grpSpPr>
+        <a:xfrm>
+          <a:off x="0" y="0"/>
+          <a:ext cx="0" cy="0"/>
+          <a:chOff x="0" y="0"/>
+          <a:chExt cx="0" cy="0"/>
+        </a:xfrm>
+      </p:grpSpPr>
+      <p:sp>
+        <p:nvSpPr>
+          <p:cNvPr id="2" name="TextBox 1">
+            <a:extLst>
+              <a:ext uri="{FF2B5EF4-FFF2-40B4-BE49-F238E27FC236}">
+                <a16:creationId xmlns:a16="http://schemas.microsoft.com/office/drawing/2014/main" xmlns="" id="{D0FE5379-552E-5DF6-EA4A-A2F73DBD82E6}"/>
+              </a:ext>
+            </a:extLst>
+          </p:cNvPr>
+          <p:cNvSpPr txBox="1"/>
           <p:nvPr/>
         </p:nvSpPr>
         <p:spPr>
           <a:xfrm>
-            <a:off x="0" y="0"/>
-            <a:ext cx="9144000" cy="5143500"/>
+            <a:off x="6516216" y="4876586"/>
+            <a:ext cx="2629244" cy="215444"/>
           </a:xfrm>
           <a:prstGeom prst="rect">
             <a:avLst/>
           </a:prstGeom>
-          <a:solidFill>
-            <a:srgbClr val="000000"/>
-          </a:solidFill>
-          <a:ln>
-            <a:noFill/>
-          </a:ln>
+          <a:noFill/>
         </p:spPr>
         <p:txBody>
-          <a:bodyPr/>
+          <a:bodyPr wrap="square" lIns="0" tIns="0" rIns="0" bIns="0">
+            <a:spAutoFit/>
+          </a:bodyPr>
           <a:lstStyle/>
-          <a:p/>
-        </p:txBody>
-      </p:sp>
-      <p:sp>
-        <p:nvSpPr>
-          <p:cNvPr id="5" name="object 3"/>
+          <a:p>
+            <a:pPr algn="ctr"/>
+            <a:r>
+              <a:rPr lang="ko-KR" altLang="en-US" spc="-100" dirty="0">
+                <a:solidFill>
+                  <a:schemeClr val="bg1">
+                    <a:lumMod val="50000"/>
+                  </a:schemeClr>
+                </a:solidFill>
+                <a:latin typeface="궁서" panose="02030600000101010101" pitchFamily="18" charset="-127"/>
+                <a:ea typeface="궁서" panose="02030600000101010101" pitchFamily="18" charset="-127"/>
+              </a:rPr>
+              <a:t>전례문 © 한국천주교중앙협의회</a:t>
+            </a:r>
+          </a:p>
+        </p:txBody>
+      </p:sp>
+      <p:sp>
+        <p:nvSpPr>
+          <p:cNvPr id="4" name="object 3">
+            <a:extLst>
+              <a:ext uri="{FF2B5EF4-FFF2-40B4-BE49-F238E27FC236}">
+                <a16:creationId xmlns:a16="http://schemas.microsoft.com/office/drawing/2014/main" xmlns="" id="{C9C3D184-83EF-43D4-8CC2-744C154AE418}"/>
+              </a:ext>
+            </a:extLst>
+          </p:cNvPr>
           <p:cNvSpPr txBox="1">
             <a:spLocks/>
           </p:cNvSpPr>
@@ -23964,8 +24268,8 @@
         </p:nvSpPr>
         <p:spPr>
           <a:xfrm>
-            <a:off x="179512" y="-20538"/>
-            <a:ext cx="8856984" cy="600164"/>
+            <a:off x="323528" y="2067694"/>
+            <a:ext cx="5421432" cy="1246495"/>
           </a:xfrm>
           <a:prstGeom prst="rect">
             <a:avLst/>
@@ -23977,73 +24281,62 @@
           </a:bodyPr>
           <a:lstStyle/>
           <a:p>
-            <a:pPr marL="9938" defTabSz="914400">
+            <a:pPr marL="9938" marR="0" lvl="0" indent="0" algn="l" defTabSz="914400" rtl="0" eaLnBrk="1" fontAlgn="auto" latinLnBrk="0" hangingPunct="1">
               <a:lnSpc>
-                <a:spcPct val="150000"/>
+                <a:spcPct val="110000"/>
               </a:lnSpc>
+              <a:spcBef>
+                <a:spcPts val="0"/>
+              </a:spcBef>
+              <a:spcAft>
+                <a:spcPts val="2400"/>
+              </a:spcAft>
+              <a:buClrTx/>
+              <a:buSzTx/>
+              <a:buFontTx/>
+              <a:buNone/>
+              <a:tabLst/>
               <a:defRPr/>
             </a:pPr>
             <a:r>
-              <a:rPr kumimoji="0" lang="ko-KR" altLang="en-US" sz="2600" b="0" i="0" u="none" strike="noStrike" kern="0" cap="none" spc="-117" normalizeH="0" baseline="0" noProof="0" dirty="0">
+              <a:rPr kumimoji="0" lang="ko-KR" altLang="en-US" sz="2800" b="1" i="0" u="none" strike="noStrike" kern="1200" cap="none" spc="0" normalizeH="0" baseline="0" noProof="0" dirty="0">
                 <a:ln>
                   <a:noFill/>
                 </a:ln>
                 <a:solidFill>
-                  <a:srgbClr val="EEECE1">
-                    <a:lumMod val="50000"/>
-                  </a:srgbClr>
+                  <a:prstClr val="white"/>
                 </a:solidFill>
                 <a:effectLst/>
                 <a:uLnTx/>
                 <a:uFillTx/>
-                <a:latin typeface="궁서" pitchFamily="18" charset="-127"/>
-                <a:ea typeface="궁서" pitchFamily="18" charset="-127"/>
+                <a:latin typeface="바탕" pitchFamily="18" charset="-127"/>
+                <a:ea typeface="바탕" pitchFamily="18" charset="-127"/>
                 <a:cs typeface="+mn-cs"/>
               </a:rPr>
-              <a:t>화 답 송   시편 139(138)</a:t>
-            </a:r>
-            <a:endParaRPr lang="ko-KR" altLang="en-US" sz="2600" kern="0" dirty="0">
-              <a:solidFill>
-                <a:srgbClr val="EEECE1">
-                  <a:lumMod val="75000"/>
-                </a:srgbClr>
-              </a:solidFill>
-              <a:latin typeface="궁서" pitchFamily="18" charset="-127"/>
-              <a:ea typeface="궁서" pitchFamily="18" charset="-127"/>
-            </a:endParaRPr>
-          </a:p>
-        </p:txBody>
-      </p:sp>
-      <p:sp>
-        <p:nvSpPr>
-          <p:cNvPr id="8" name="Rectangle 4">
-            <a:extLst>
-              <a:ext uri="{FF2B5EF4-FFF2-40B4-BE49-F238E27FC236}">
-                <a16:creationId xmlns:a16="http://schemas.microsoft.com/office/drawing/2014/main" xmlns="" id="{D4766CF3-9F91-47A3-BADF-F0FA5677B86A}"/>
-              </a:ext>
-            </a:extLst>
-          </p:cNvPr>
-          <p:cNvSpPr/>
-          <p:nvPr/>
-        </p:nvSpPr>
-        <p:spPr>
-          <a:xfrm>
-            <a:off x="6602690" y="21371"/>
-            <a:ext cx="2505814" cy="400110"/>
-          </a:xfrm>
-          <a:prstGeom prst="rect">
-            <a:avLst/>
-          </a:prstGeom>
-        </p:spPr>
-        <p:txBody>
-          <a:bodyPr wrap="none">
-            <a:spAutoFit/>
-          </a:bodyPr>
-          <a:lstStyle/>
-          <a:p>
-            <a:pPr marL="0" marR="0" lvl="0" indent="0" algn="l" defTabSz="715558" rtl="0" eaLnBrk="1" fontAlgn="auto" latinLnBrk="0" hangingPunct="1">
+              <a:t>주님의 말씀입니다</a:t>
+            </a:r>
+            <a:r>
+              <a:rPr kumimoji="0" lang="en-US" altLang="ko-KR" sz="2800" b="1" i="0" u="none" strike="noStrike" kern="1200" cap="none" spc="0" normalizeH="0" baseline="0" noProof="0" dirty="0">
+                <a:ln>
+                  <a:noFill/>
+                </a:ln>
+                <a:solidFill>
+                  <a:prstClr val="white"/>
+                </a:solidFill>
+                <a:effectLst/>
+                <a:uLnTx/>
+                <a:uFillTx/>
+                <a:latin typeface="바탕" pitchFamily="18" charset="-127"/>
+                <a:ea typeface="바탕" pitchFamily="18" charset="-127"/>
+                <a:cs typeface="+mn-cs"/>
+              </a:rPr>
+              <a:t>.</a:t>
+            </a:r>
+          </a:p>
+          <a:p>
+            <a:pPr marL="9938" marR="0" lvl="0" indent="0" algn="l" defTabSz="914400" rtl="0" eaLnBrk="1" fontAlgn="auto" latinLnBrk="0" hangingPunct="1">
               <a:lnSpc>
-                <a:spcPct val="100000"/>
+                <a:spcPct val="110000"/>
               </a:lnSpc>
               <a:spcBef>
                 <a:spcPts val="0"/>
@@ -24059,176 +24352,115 @@
               <a:defRPr/>
             </a:pPr>
             <a:r>
-              <a:rPr kumimoji="0" lang="en-AU" sz="2000" b="1" i="0" u="none" strike="noStrike" kern="1200" cap="none" spc="0" normalizeH="0" baseline="0" noProof="0" dirty="0">
+              <a:rPr kumimoji="0" lang="ko-KR" altLang="en-US" sz="3200" b="1" i="0" u="none" strike="noStrike" kern="1200" cap="none" spc="0" normalizeH="0" baseline="0" noProof="0" dirty="0">
                 <a:ln>
                   <a:noFill/>
                 </a:ln>
                 <a:solidFill>
-                  <a:srgbClr val="C0504D"/>
+                  <a:srgbClr val="EEECE1">
+                    <a:lumMod val="90000"/>
+                  </a:srgbClr>
                 </a:solidFill>
                 <a:effectLst/>
                 <a:uLnTx/>
                 <a:uFillTx/>
-                <a:latin typeface="dotum" panose="020B0600000101010101" pitchFamily="50" charset="-127"/>
-                <a:ea typeface="dotum" panose="020B0600000101010101" pitchFamily="50" charset="-127"/>
+                <a:latin typeface="바탕" pitchFamily="18" charset="-127"/>
+                <a:ea typeface="바탕" pitchFamily="18" charset="-127"/>
                 <a:cs typeface="+mn-cs"/>
               </a:rPr>
-              <a:t>Responsorial Psalm</a:t>
-            </a:r>
-            <a:endParaRPr kumimoji="0" lang="en-AU" sz="2000" b="0" i="0" u="none" strike="noStrike" kern="1200" cap="none" spc="0" normalizeH="0" baseline="0" noProof="0" dirty="0">
+              <a:t>◎ 하느님</a:t>
+            </a:r>
+            <a:r>
+              <a:rPr kumimoji="0" lang="en-US" altLang="ko-KR" sz="3200" b="1" i="0" u="none" strike="noStrike" kern="1200" cap="none" spc="0" normalizeH="0" baseline="0" noProof="0" dirty="0">
+                <a:ln>
+                  <a:noFill/>
+                </a:ln>
+                <a:solidFill>
+                  <a:srgbClr val="EEECE1">
+                    <a:lumMod val="90000"/>
+                  </a:srgbClr>
+                </a:solidFill>
+                <a:effectLst/>
+                <a:uLnTx/>
+                <a:uFillTx/>
+                <a:latin typeface="바탕" pitchFamily="18" charset="-127"/>
+                <a:ea typeface="바탕" pitchFamily="18" charset="-127"/>
+                <a:cs typeface="+mn-cs"/>
+              </a:rPr>
+              <a:t>,</a:t>
+            </a:r>
+            <a:r>
+              <a:rPr kumimoji="0" lang="ko-KR" altLang="en-US" sz="3200" b="1" i="0" u="none" strike="noStrike" kern="1200" cap="none" spc="0" normalizeH="0" baseline="0" noProof="0" dirty="0">
+                <a:ln>
+                  <a:noFill/>
+                </a:ln>
+                <a:solidFill>
+                  <a:srgbClr val="EEECE1">
+                    <a:lumMod val="90000"/>
+                  </a:srgbClr>
+                </a:solidFill>
+                <a:effectLst/>
+                <a:uLnTx/>
+                <a:uFillTx/>
+                <a:latin typeface="바탕" pitchFamily="18" charset="-127"/>
+                <a:ea typeface="바탕" pitchFamily="18" charset="-127"/>
+                <a:cs typeface="+mn-cs"/>
+              </a:rPr>
+              <a:t> 감사합니다</a:t>
+            </a:r>
+            <a:r>
+              <a:rPr kumimoji="0" lang="en-US" altLang="ko-KR" sz="3200" b="1" i="0" u="none" strike="noStrike" kern="1200" cap="none" spc="0" normalizeH="0" baseline="0" noProof="0" dirty="0">
+                <a:ln>
+                  <a:noFill/>
+                </a:ln>
+                <a:solidFill>
+                  <a:srgbClr val="EEECE1">
+                    <a:lumMod val="90000"/>
+                  </a:srgbClr>
+                </a:solidFill>
+                <a:effectLst/>
+                <a:uLnTx/>
+                <a:uFillTx/>
+                <a:latin typeface="바탕" pitchFamily="18" charset="-127"/>
+                <a:ea typeface="바탕" pitchFamily="18" charset="-127"/>
+                <a:cs typeface="+mn-cs"/>
+              </a:rPr>
+              <a:t>.</a:t>
+            </a:r>
+            <a:endParaRPr kumimoji="0" lang="en-US" altLang="ko-KR" sz="3200" b="1" i="0" u="none" strike="noStrike" kern="1200" cap="none" spc="-100" normalizeH="0" baseline="0" noProof="0" dirty="0">
               <a:ln>
                 <a:noFill/>
               </a:ln>
               <a:solidFill>
-                <a:srgbClr val="C0504D"/>
+                <a:prstClr val="white"/>
               </a:solidFill>
               <a:effectLst/>
               <a:uLnTx/>
               <a:uFillTx/>
-              <a:latin typeface="Calibri"/>
-              <a:ea typeface="+mn-ea"/>
+              <a:latin typeface="Batang" pitchFamily="18" charset="-127"/>
+              <a:ea typeface="Batang" pitchFamily="18" charset="-127"/>
               <a:cs typeface="+mn-cs"/>
             </a:endParaRPr>
           </a:p>
         </p:txBody>
       </p:sp>
-      <p:sp>
-        <p:nvSpPr>
-          <p:cNvPr id="2" name="TextBox 1">
-            <a:extLst>
-              <a:ext uri="{FF2B5EF4-FFF2-40B4-BE49-F238E27FC236}">
-                <a16:creationId xmlns:a16="http://schemas.microsoft.com/office/drawing/2014/main" xmlns="" id="{5157316C-57D6-EBB9-91F6-145DA88765BA}"/>
-              </a:ext>
-            </a:extLst>
-          </p:cNvPr>
-          <p:cNvSpPr txBox="1"/>
-          <p:nvPr/>
-        </p:nvSpPr>
-        <p:spPr>
-          <a:xfrm>
-            <a:off x="6479260" y="4842932"/>
-            <a:ext cx="2629244" cy="215444"/>
-          </a:xfrm>
-          <a:prstGeom prst="rect">
-            <a:avLst/>
-          </a:prstGeom>
-          <a:noFill/>
-        </p:spPr>
-        <p:txBody>
-          <a:bodyPr wrap="square" lIns="0" tIns="0" rIns="0" bIns="0">
-            <a:spAutoFit/>
-          </a:bodyPr>
-          <a:lstStyle/>
-          <a:p>
-            <a:pPr algn="ctr"/>
-            <a:r>
-              <a:rPr lang="ko-KR" altLang="en-US" spc="-100" dirty="0">
-                <a:solidFill>
-                  <a:schemeClr val="bg1">
-                    <a:lumMod val="50000"/>
-                  </a:schemeClr>
-                </a:solidFill>
-                <a:latin typeface="궁서" panose="02030600000101010101" pitchFamily="18" charset="-127"/>
-                <a:ea typeface="궁서" panose="02030600000101010101" pitchFamily="18" charset="-127"/>
-              </a:rPr>
-              <a:t>전례문 © 한국천주교중앙협의회</a:t>
-            </a:r>
-          </a:p>
-        </p:txBody>
-      </p:sp>
-      <p:sp>
-        <p:nvSpPr>
-          <p:cNvPr id="4" name="object 3">
-            <a:extLst>
-              <a:ext uri="{FF2B5EF4-FFF2-40B4-BE49-F238E27FC236}">
-                <a16:creationId xmlns:a16="http://schemas.microsoft.com/office/drawing/2014/main" xmlns="" id="{F8849E71-E989-7DF3-13FE-C6AE418D96A7}"/>
-              </a:ext>
-            </a:extLst>
-          </p:cNvPr>
-          <p:cNvSpPr txBox="1">
-            <a:spLocks/>
-          </p:cNvSpPr>
-          <p:nvPr/>
-        </p:nvSpPr>
-        <p:spPr>
-          <a:xfrm>
-            <a:off x="35496" y="627534"/>
-            <a:ext cx="9001000" cy="3154710"/>
-          </a:xfrm>
-          <a:prstGeom prst="rect">
-            <a:avLst/>
-          </a:prstGeom>
-        </p:spPr>
-        <p:txBody>
-          <a:bodyPr vert="horz" wrap="square" lIns="0" tIns="0" rIns="0" bIns="0" rtlCol="0">
-            <a:spAutoFit/>
-          </a:bodyPr>
-          <a:lstStyle/>
-          <a:p>
-            <a:pPr marL="719138" indent="-719138" defTabSz="914400">
-              <a:spcAft>
-                <a:spcPts val="4200"/>
-              </a:spcAft>
-              <a:tabLst>
-                <a:tab pos="361950" algn="l"/>
-              </a:tabLst>
-            </a:pPr>
-            <a:r>
-              <a:rPr lang="ko-KR" altLang="en-US" sz="3700" b="1" dirty="0">
-                <a:solidFill>
-                  <a:schemeClr val="bg2">
-                    <a:lumMod val="90000"/>
-                  </a:schemeClr>
-                </a:solidFill>
-                <a:latin typeface="바탕" pitchFamily="18" charset="-127"/>
-                <a:ea typeface="바탕" pitchFamily="18" charset="-127"/>
-              </a:rPr>
-              <a:t>◎	오묘하게 지어 주신 이 몸, 당신을 찬송하나이다.</a:t>
-            </a:r>
-            <a:endParaRPr lang="en-US" altLang="ko-KR" sz="3700" b="1" dirty="0">
-              <a:solidFill>
-                <a:schemeClr val="bg2">
-                  <a:lumMod val="90000"/>
-                </a:schemeClr>
-              </a:solidFill>
-              <a:latin typeface="바탕" panose="02030600000101010101" pitchFamily="18" charset="-127"/>
-              <a:ea typeface="바탕" panose="02030600000101010101" pitchFamily="18" charset="-127"/>
-            </a:endParaRPr>
-          </a:p>
-          <a:p>
-            <a:pPr marL="719138" indent="-719138" defTabSz="914400">
-              <a:spcAft>
-                <a:spcPts val="4200"/>
-              </a:spcAft>
-              <a:tabLst>
-                <a:tab pos="361950" algn="l"/>
-              </a:tabLst>
-            </a:pPr>
-            <a:r>
-              <a:rPr lang="ko-KR" altLang="en-US" sz="3000" b="1" dirty="0">
-                <a:solidFill>
-                  <a:schemeClr val="bg1"/>
-                </a:solidFill>
-                <a:latin typeface="바탕" pitchFamily="18" charset="-127"/>
-                <a:ea typeface="바탕" pitchFamily="18" charset="-127"/>
-              </a:rPr>
-              <a:t>○	주님, 당신은 저를 살펴보시고 잘 아시나이다. 앉으나 서나 당신은 저를 아시고, 멀리서도 제 생각 알아차리시나이다. 길을 가도 누워 있어도 헤아리시니, 당신은 저의 길 모두 아시나이다. ◎</a:t>
-            </a:r>
-            <a:endParaRPr lang="en-US" altLang="ko-KR" sz="3200" b="1" dirty="0">
-              <a:solidFill>
-                <a:schemeClr val="bg1"/>
-              </a:solidFill>
-              <a:latin typeface="바탕" panose="02030600000101010101" pitchFamily="18" charset="-127"/>
-              <a:ea typeface="바탕" panose="02030600000101010101" pitchFamily="18" charset="-127"/>
-            </a:endParaRPr>
-          </a:p>
-        </p:txBody>
-      </p:sp>
     </p:spTree>
+    <p:extLst>
+      <p:ext uri="{BB962C8B-B14F-4D97-AF65-F5344CB8AC3E}">
+        <p14:creationId xmlns:p14="http://schemas.microsoft.com/office/powerpoint/2010/main" xmlns="" val="1467768127"/>
+      </p:ext>
+    </p:extLst>
   </p:cSld>
   <p:clrMapOvr>
     <a:masterClrMapping/>
   </p:clrMapOvr>
+  <p:timing>
+    <p:tnLst>
+      <p:par>
+        <p:cTn id="1" dur="indefinite" restart="never" nodeType="tmRoot"/>
+      </p:par>
+    </p:tnLst>
+  </p:timing>
 </p:sld>
 </file>
 
@@ -25849,32 +26081,12 @@
             <a:r>
               <a:rPr lang="en-US" altLang="ko-KR" sz="3200" b="1" dirty="0" smtClean="0">
                 <a:solidFill>
-                  <a:srgbClr val="FFC000"/>
+                  <a:schemeClr val="bg1"/>
                 </a:solidFill>
                 <a:latin typeface="바탕" panose="02030600000101010101" pitchFamily="18" charset="-127"/>
                 <a:ea typeface="바탕" panose="02030600000101010101" pitchFamily="18" charset="-127"/>
               </a:rPr>
-              <a:t>80 </a:t>
-            </a:r>
-            <a:r>
-              <a:rPr lang="en-US" altLang="ko-KR" sz="3200" b="1" dirty="0" smtClean="0">
-                <a:solidFill>
-                  <a:schemeClr val="bg1"/>
-                </a:solidFill>
-                <a:latin typeface="바탕" panose="02030600000101010101" pitchFamily="18" charset="-127"/>
-                <a:ea typeface="바탕" panose="02030600000101010101" pitchFamily="18" charset="-127"/>
-              </a:rPr>
-              <a:t>아기는 자라면서 정신도 굳세어졌다. 그리고</a:t>
-            </a:r>
-            <a:r>
-              <a:rPr lang="en-US" altLang="ko-KR" sz="3200" b="1" dirty="0" smtClean="0">
-                <a:solidFill>
-                  <a:schemeClr val="bg1"/>
-                </a:solidFill>
-                <a:latin typeface="바탕" panose="02030600000101010101" pitchFamily="18" charset="-127"/>
-                <a:ea typeface="바탕" panose="02030600000101010101" pitchFamily="18" charset="-127"/>
-              </a:rPr>
-              <a:t> </a:t>
+              <a:t/>
             </a:r>
             <a:r>
               <a:rPr lang="en-US" altLang="ko-KR" sz="3200" b="1" dirty="0" smtClean="0">
@@ -25923,7 +26135,7 @@
         </p:nvSpPr>
         <p:spPr>
           <a:xfrm>
-            <a:off x="323528" y="2303968"/>
+            <a:off x="323528" y="1842958"/>
             <a:ext cx="5421432" cy="1246495"/>
           </a:xfrm>
           <a:prstGeom prst="rect">
@@ -26462,6 +26674,36 @@
                 <a:ea typeface="바탕" panose="02030600000101010101" pitchFamily="18" charset="-127"/>
               </a:rPr>
               <a:t>계셨던 것이다.</a:t>
+            </a:r>
+          </a:p>
+          <a:p>
+            <a:pPr>
+              <a:lnSpc>
+                <a:spcPct val="110000"/>
+              </a:lnSpc>
+              <a:spcAft>
+                <a:spcPts val="300"/>
+              </a:spcAft>
+            </a:pPr>
+            <a:r>
+              <a:rPr lang="en-US" altLang="ko-KR" sz="3200" b="1" dirty="0" smtClean="0">
+                <a:solidFill>
+                  <a:srgbClr val="FFC000"/>
+                </a:solidFill>
+                <a:latin typeface="바탕" panose="02030600000101010101" pitchFamily="18" charset="-127"/>
+                <a:ea typeface="바탕" panose="02030600000101010101" pitchFamily="18" charset="-127"/>
+              </a:rPr>
+              <a:t>80 </a:t>
+            </a:r>
+            <a:r>
+              <a:rPr lang="en-US" altLang="ko-KR" sz="3200" b="1" dirty="0" smtClean="0">
+                <a:solidFill>
+                  <a:schemeClr val="bg1"/>
+                </a:solidFill>
+                <a:latin typeface="바탕" panose="02030600000101010101" pitchFamily="18" charset="-127"/>
+                <a:ea typeface="바탕" panose="02030600000101010101" pitchFamily="18" charset="-127"/>
+              </a:rPr>
+              <a:t>아기는 자라면서 정신도 굳세어졌다. 그리고</a:t>
             </a:r>
           </a:p>
         </p:txBody>
@@ -33014,8 +33256,16 @@
 </file>
 
 <file path=ppt/slides/slide68.xml><?xml version="1.0" encoding="utf-8"?>
-<p:sld xmlns:a="http://schemas.openxmlformats.org/drawingml/2006/main" xmlns:p="http://schemas.openxmlformats.org/presentationml/2006/main" xmlns:r="http://schemas.openxmlformats.org/officeDocument/2006/relationships">
+<p:sld xmlns:a="http://schemas.openxmlformats.org/drawingml/2006/main" xmlns:p="http://schemas.openxmlformats.org/presentationml/2006/main" xmlns:r="http://schemas.openxmlformats.org/officeDocument/2006/relationships" showMasterSp="0">
   <p:cSld>
+    <p:bg>
+      <p:bgPr>
+        <a:solidFill>
+          <a:srgbClr val="000000"/>
+        </a:solidFill>
+        <a:effectLst/>
+      </p:bgPr>
+    </p:bg>
     <p:spTree>
       <p:nvGrpSpPr>
         <p:cNvPr id="1" name=""/>
@@ -33025,57 +33275,36 @@
       <p:grpSpPr/>
       <p:sp>
         <p:nvSpPr>
-          <p:cNvPr id="2" name="TextBox 1">
-            <a:extLst>
-              <a:ext uri="{FF2B5EF4-FFF2-40B4-BE49-F238E27FC236}">
-                <a16:creationId xmlns:a16="http://schemas.microsoft.com/office/drawing/2014/main" xmlns="" id="{D0FE5379-552E-5DF6-EA4A-A2F73DBD82E6}"/>
-              </a:ext>
-            </a:extLst>
-          </p:cNvPr>
-          <p:cNvSpPr txBox="1"/>
+          <p:cNvPr id="9999" name="BlackBg"/>
+          <p:cNvSpPr>
+            <a:spLocks noGrp="1"/>
+          </p:cNvSpPr>
           <p:nvPr/>
         </p:nvSpPr>
         <p:spPr>
           <a:xfrm>
-            <a:off x="6516216" y="4876586"/>
-            <a:ext cx="2629244" cy="215444"/>
+            <a:off x="0" y="0"/>
+            <a:ext cx="9144000" cy="5143500"/>
           </a:xfrm>
           <a:prstGeom prst="rect">
             <a:avLst/>
           </a:prstGeom>
-          <a:noFill/>
+          <a:solidFill>
+            <a:srgbClr val="000000"/>
+          </a:solidFill>
+          <a:ln>
+            <a:noFill/>
+          </a:ln>
         </p:spPr>
         <p:txBody>
-          <a:bodyPr wrap="square" lIns="0" tIns="0" rIns="0" bIns="0">
-            <a:spAutoFit/>
-          </a:bodyPr>
+          <a:bodyPr/>
           <a:lstStyle/>
-          <a:p>
-            <a:pPr algn="ctr"/>
-            <a:r>
-              <a:rPr lang="ko-KR" altLang="en-US" spc="-100" dirty="0">
-                <a:solidFill>
-                  <a:schemeClr val="bg1">
-                    <a:lumMod val="50000"/>
-                  </a:schemeClr>
-                </a:solidFill>
-                <a:latin typeface="궁서" panose="02030600000101010101" pitchFamily="18" charset="-127"/>
-                <a:ea typeface="궁서" panose="02030600000101010101" pitchFamily="18" charset="-127"/>
-              </a:rPr>
-              <a:t>전례문 © 한국천주교중앙협의회</a:t>
-            </a:r>
-          </a:p>
-        </p:txBody>
-      </p:sp>
-      <p:sp>
-        <p:nvSpPr>
-          <p:cNvPr id="3" name="object 3">
-            <a:extLst>
-              <a:ext uri="{FF2B5EF4-FFF2-40B4-BE49-F238E27FC236}">
-                <a16:creationId xmlns:a16="http://schemas.microsoft.com/office/drawing/2014/main" xmlns="" id="{E5A6ECC0-0A15-80D4-405D-B92AB07E8085}"/>
-              </a:ext>
-            </a:extLst>
-          </p:cNvPr>
+          <a:p/>
+        </p:txBody>
+      </p:sp>
+      <p:sp>
+        <p:nvSpPr>
+          <p:cNvPr id="5" name="object 3"/>
           <p:cNvSpPr txBox="1">
             <a:spLocks/>
           </p:cNvSpPr>
@@ -33083,8 +33312,8 @@
         </p:nvSpPr>
         <p:spPr>
           <a:xfrm>
-            <a:off x="35496" y="51470"/>
-            <a:ext cx="9001000" cy="4326313"/>
+            <a:off x="179512" y="-20538"/>
+            <a:ext cx="8856984" cy="600164"/>
           </a:xfrm>
           <a:prstGeom prst="rect">
             <a:avLst/>
@@ -33096,202 +33325,73 @@
           </a:bodyPr>
           <a:lstStyle/>
           <a:p>
-            <a:pPr lvl="0" defTabSz="914400">
+            <a:pPr marL="9938" defTabSz="914400">
               <a:lnSpc>
-                <a:spcPct val="110000"/>
+                <a:spcPct val="150000"/>
               </a:lnSpc>
-              <a:spcAft>
-                <a:spcPts val="600"/>
-              </a:spcAft>
+              <a:defRPr/>
             </a:pPr>
             <a:r>
-              <a:rPr lang="en-US" altLang="ko-KR" sz="3200" b="1" dirty="0" smtClean="0">
-                <a:solidFill>
-                  <a:srgbClr val="FFC000"/>
-                </a:solidFill>
-                <a:latin typeface="바탕" panose="02030600000101010101" pitchFamily="18" charset="-127"/>
-                <a:ea typeface="바탕" panose="02030600000101010101" pitchFamily="18" charset="-127"/>
-              </a:rPr>
-              <a:t>6 </a:t>
-            </a:r>
-            <a:r>
-              <a:rPr lang="en-US" altLang="ko-KR" sz="3200" b="1" dirty="0" smtClean="0">
-                <a:solidFill>
-                  <a:schemeClr val="bg1"/>
-                </a:solidFill>
-                <a:latin typeface="바탕" panose="02030600000101010101" pitchFamily="18" charset="-127"/>
-                <a:ea typeface="바탕" panose="02030600000101010101" pitchFamily="18" charset="-127"/>
-              </a:rPr>
-              <a:t>그분께서 말씀하신다. “네가 나의 종이 되어</a:t>
-            </a:r>
-            <a:r>
-              <a:rPr lang="en-US" altLang="ko-KR" sz="3200" b="1" dirty="0" smtClean="0">
-                <a:solidFill>
-                  <a:schemeClr val="bg1"/>
-                </a:solidFill>
-                <a:latin typeface="바탕" panose="02030600000101010101" pitchFamily="18" charset="-127"/>
-                <a:ea typeface="바탕" panose="02030600000101010101" pitchFamily="18" charset="-127"/>
-              </a:rPr>
-              <a:t> </a:t>
-            </a:r>
-            <a:r>
-              <a:rPr lang="en-US" altLang="ko-KR" sz="3200" b="1" dirty="0" smtClean="0">
-                <a:solidFill>
-                  <a:schemeClr val="bg1"/>
-                </a:solidFill>
-                <a:latin typeface="바탕" panose="02030600000101010101" pitchFamily="18" charset="-127"/>
-                <a:ea typeface="바탕" panose="02030600000101010101" pitchFamily="18" charset="-127"/>
-              </a:rPr>
-              <a:t>야곱의 지파들을 다시 일으키고 이스라엘의</a:t>
-            </a:r>
-            <a:r>
-              <a:rPr lang="en-US" altLang="ko-KR" sz="3200" b="1" dirty="0" smtClean="0">
-                <a:solidFill>
-                  <a:schemeClr val="bg1"/>
-                </a:solidFill>
-                <a:latin typeface="바탕" panose="02030600000101010101" pitchFamily="18" charset="-127"/>
-                <a:ea typeface="바탕" panose="02030600000101010101" pitchFamily="18" charset="-127"/>
-              </a:rPr>
-              <a:t> </a:t>
-            </a:r>
-            <a:r>
-              <a:rPr lang="en-US" altLang="ko-KR" sz="3200" b="1" dirty="0" smtClean="0">
-                <a:solidFill>
-                  <a:schemeClr val="bg1"/>
-                </a:solidFill>
-                <a:latin typeface="바탕" panose="02030600000101010101" pitchFamily="18" charset="-127"/>
-                <a:ea typeface="바탕" panose="02030600000101010101" pitchFamily="18" charset="-127"/>
-              </a:rPr>
-              <a:t>생존자들을 돌아오게 하는 것만으로는 충분하지</a:t>
-            </a:r>
-            <a:r>
-              <a:rPr lang="en-US" altLang="ko-KR" sz="3200" b="1" dirty="0" smtClean="0">
-                <a:solidFill>
-                  <a:schemeClr val="bg1"/>
-                </a:solidFill>
-                <a:latin typeface="바탕" panose="02030600000101010101" pitchFamily="18" charset="-127"/>
-                <a:ea typeface="바탕" panose="02030600000101010101" pitchFamily="18" charset="-127"/>
-              </a:rPr>
-              <a:t> </a:t>
-            </a:r>
-            <a:r>
-              <a:rPr lang="en-US" altLang="ko-KR" sz="3200" b="1" dirty="0" smtClean="0">
-                <a:solidFill>
-                  <a:schemeClr val="bg1"/>
-                </a:solidFill>
-                <a:latin typeface="바탕" panose="02030600000101010101" pitchFamily="18" charset="-127"/>
-                <a:ea typeface="바탕" panose="02030600000101010101" pitchFamily="18" charset="-127"/>
-              </a:rPr>
-              <a:t>않다. 나의 구원이 땅끝까지 다다르도록 나는 너를</a:t>
-            </a:r>
-            <a:r>
-              <a:rPr lang="en-US" altLang="ko-KR" sz="3200" b="1" dirty="0" smtClean="0">
-                <a:solidFill>
-                  <a:schemeClr val="bg1"/>
-                </a:solidFill>
-                <a:latin typeface="바탕" panose="02030600000101010101" pitchFamily="18" charset="-127"/>
-                <a:ea typeface="바탕" panose="02030600000101010101" pitchFamily="18" charset="-127"/>
-              </a:rPr>
-              <a:t> </a:t>
-            </a:r>
-            <a:r>
-              <a:rPr lang="en-US" altLang="ko-KR" sz="3200" b="1" dirty="0" smtClean="0">
-                <a:solidFill>
-                  <a:schemeClr val="bg1"/>
-                </a:solidFill>
-                <a:latin typeface="바탕" panose="02030600000101010101" pitchFamily="18" charset="-127"/>
-                <a:ea typeface="바탕" panose="02030600000101010101" pitchFamily="18" charset="-127"/>
-              </a:rPr>
-              <a:t>민족들의 빛으로 세운다.”</a:t>
-            </a:r>
-          </a:p>
-        </p:txBody>
-      </p:sp>
-      <p:sp>
-        <p:nvSpPr>
-          <p:cNvPr id="4" name="object 3">
+              <a:rPr kumimoji="0" lang="ko-KR" altLang="en-US" sz="2600" b="0" i="0" u="none" strike="noStrike" kern="0" cap="none" spc="-117" normalizeH="0" baseline="0" noProof="0" dirty="0">
+                <a:ln>
+                  <a:noFill/>
+                </a:ln>
+                <a:solidFill>
+                  <a:srgbClr val="EEECE1">
+                    <a:lumMod val="50000"/>
+                  </a:srgbClr>
+                </a:solidFill>
+                <a:effectLst/>
+                <a:uLnTx/>
+                <a:uFillTx/>
+                <a:latin typeface="궁서" pitchFamily="18" charset="-127"/>
+                <a:ea typeface="궁서" pitchFamily="18" charset="-127"/>
+                <a:cs typeface="+mn-cs"/>
+              </a:rPr>
+              <a:t>화 답 송   시편 139(138)</a:t>
+            </a:r>
+            <a:endParaRPr lang="ko-KR" altLang="en-US" sz="2600" kern="0" dirty="0">
+              <a:solidFill>
+                <a:srgbClr val="EEECE1">
+                  <a:lumMod val="75000"/>
+                </a:srgbClr>
+              </a:solidFill>
+              <a:latin typeface="궁서" pitchFamily="18" charset="-127"/>
+              <a:ea typeface="궁서" pitchFamily="18" charset="-127"/>
+            </a:endParaRPr>
+          </a:p>
+        </p:txBody>
+      </p:sp>
+      <p:sp>
+        <p:nvSpPr>
+          <p:cNvPr id="8" name="Rectangle 4">
             <a:extLst>
               <a:ext uri="{FF2B5EF4-FFF2-40B4-BE49-F238E27FC236}">
-                <a16:creationId xmlns:a16="http://schemas.microsoft.com/office/drawing/2014/main" xmlns="" id="{C9C3D184-83EF-43D4-8CC2-744C154AE418}"/>
+                <a16:creationId xmlns:a16="http://schemas.microsoft.com/office/drawing/2014/main" xmlns="" id="{D4766CF3-9F91-47A3-BADF-F0FA5677B86A}"/>
               </a:ext>
             </a:extLst>
           </p:cNvPr>
-          <p:cNvSpPr txBox="1">
-            <a:spLocks/>
-          </p:cNvSpPr>
+          <p:cNvSpPr/>
           <p:nvPr/>
         </p:nvSpPr>
         <p:spPr>
           <a:xfrm>
-            <a:off x="323528" y="3278540"/>
-            <a:ext cx="5421432" cy="1246495"/>
+            <a:off x="6602690" y="21371"/>
+            <a:ext cx="2505814" cy="400110"/>
           </a:xfrm>
           <a:prstGeom prst="rect">
             <a:avLst/>
           </a:prstGeom>
         </p:spPr>
         <p:txBody>
-          <a:bodyPr vert="horz" wrap="square" lIns="0" tIns="0" rIns="0" bIns="0" rtlCol="0">
+          <a:bodyPr wrap="none">
             <a:spAutoFit/>
           </a:bodyPr>
           <a:lstStyle/>
           <a:p>
-            <a:pPr marL="9938" marR="0" lvl="0" indent="0" algn="l" defTabSz="914400" rtl="0" eaLnBrk="1" fontAlgn="auto" latinLnBrk="0" hangingPunct="1">
+            <a:pPr marL="0" marR="0" lvl="0" indent="0" algn="l" defTabSz="715558" rtl="0" eaLnBrk="1" fontAlgn="auto" latinLnBrk="0" hangingPunct="1">
               <a:lnSpc>
-                <a:spcPct val="110000"/>
-              </a:lnSpc>
-              <a:spcBef>
-                <a:spcPts val="0"/>
-              </a:spcBef>
-              <a:spcAft>
-                <a:spcPts val="2400"/>
-              </a:spcAft>
-              <a:buClrTx/>
-              <a:buSzTx/>
-              <a:buFontTx/>
-              <a:buNone/>
-              <a:tabLst/>
-              <a:defRPr/>
-            </a:pPr>
-            <a:r>
-              <a:rPr kumimoji="0" lang="ko-KR" altLang="en-US" sz="2800" b="1" i="0" u="none" strike="noStrike" kern="1200" cap="none" spc="0" normalizeH="0" baseline="0" noProof="0" dirty="0">
-                <a:ln>
-                  <a:noFill/>
-                </a:ln>
-                <a:solidFill>
-                  <a:prstClr val="white"/>
-                </a:solidFill>
-                <a:effectLst/>
-                <a:uLnTx/>
-                <a:uFillTx/>
-                <a:latin typeface="바탕" pitchFamily="18" charset="-127"/>
-                <a:ea typeface="바탕" pitchFamily="18" charset="-127"/>
-                <a:cs typeface="+mn-cs"/>
-              </a:rPr>
-              <a:t>주님의 말씀입니다</a:t>
-            </a:r>
-            <a:r>
-              <a:rPr kumimoji="0" lang="en-US" altLang="ko-KR" sz="2800" b="1" i="0" u="none" strike="noStrike" kern="1200" cap="none" spc="0" normalizeH="0" baseline="0" noProof="0" dirty="0">
-                <a:ln>
-                  <a:noFill/>
-                </a:ln>
-                <a:solidFill>
-                  <a:prstClr val="white"/>
-                </a:solidFill>
-                <a:effectLst/>
-                <a:uLnTx/>
-                <a:uFillTx/>
-                <a:latin typeface="바탕" pitchFamily="18" charset="-127"/>
-                <a:ea typeface="바탕" pitchFamily="18" charset="-127"/>
-                <a:cs typeface="+mn-cs"/>
-              </a:rPr>
-              <a:t>.</a:t>
-            </a:r>
-          </a:p>
-          <a:p>
-            <a:pPr marL="9938" marR="0" lvl="0" indent="0" algn="l" defTabSz="914400" rtl="0" eaLnBrk="1" fontAlgn="auto" latinLnBrk="0" hangingPunct="1">
-              <a:lnSpc>
-                <a:spcPct val="110000"/>
+                <a:spcPct val="100000"/>
               </a:lnSpc>
               <a:spcBef>
                 <a:spcPts val="0"/>
@@ -33307,94 +33407,173 @@
               <a:defRPr/>
             </a:pPr>
             <a:r>
-              <a:rPr kumimoji="0" lang="ko-KR" altLang="en-US" sz="3200" b="1" i="0" u="none" strike="noStrike" kern="1200" cap="none" spc="0" normalizeH="0" baseline="0" noProof="0" dirty="0">
+              <a:rPr kumimoji="0" lang="en-AU" sz="2000" b="1" i="0" u="none" strike="noStrike" kern="1200" cap="none" spc="0" normalizeH="0" baseline="0" noProof="0" dirty="0">
                 <a:ln>
                   <a:noFill/>
                 </a:ln>
                 <a:solidFill>
-                  <a:srgbClr val="EEECE1">
-                    <a:lumMod val="90000"/>
-                  </a:srgbClr>
+                  <a:srgbClr val="C0504D"/>
                 </a:solidFill>
                 <a:effectLst/>
                 <a:uLnTx/>
                 <a:uFillTx/>
-                <a:latin typeface="바탕" pitchFamily="18" charset="-127"/>
-                <a:ea typeface="바탕" pitchFamily="18" charset="-127"/>
+                <a:latin typeface="dotum" panose="020B0600000101010101" pitchFamily="50" charset="-127"/>
+                <a:ea typeface="dotum" panose="020B0600000101010101" pitchFamily="50" charset="-127"/>
                 <a:cs typeface="+mn-cs"/>
               </a:rPr>
-              <a:t>◎ 하느님</a:t>
-            </a:r>
-            <a:r>
-              <a:rPr kumimoji="0" lang="en-US" altLang="ko-KR" sz="3200" b="1" i="0" u="none" strike="noStrike" kern="1200" cap="none" spc="0" normalizeH="0" baseline="0" noProof="0" dirty="0">
-                <a:ln>
-                  <a:noFill/>
-                </a:ln>
-                <a:solidFill>
-                  <a:srgbClr val="EEECE1">
-                    <a:lumMod val="90000"/>
-                  </a:srgbClr>
-                </a:solidFill>
-                <a:effectLst/>
-                <a:uLnTx/>
-                <a:uFillTx/>
-                <a:latin typeface="바탕" pitchFamily="18" charset="-127"/>
-                <a:ea typeface="바탕" pitchFamily="18" charset="-127"/>
-                <a:cs typeface="+mn-cs"/>
-              </a:rPr>
-              <a:t>,</a:t>
-            </a:r>
-            <a:r>
-              <a:rPr kumimoji="0" lang="ko-KR" altLang="en-US" sz="3200" b="1" i="0" u="none" strike="noStrike" kern="1200" cap="none" spc="0" normalizeH="0" baseline="0" noProof="0" dirty="0">
-                <a:ln>
-                  <a:noFill/>
-                </a:ln>
-                <a:solidFill>
-                  <a:srgbClr val="EEECE1">
-                    <a:lumMod val="90000"/>
-                  </a:srgbClr>
-                </a:solidFill>
-                <a:effectLst/>
-                <a:uLnTx/>
-                <a:uFillTx/>
-                <a:latin typeface="바탕" pitchFamily="18" charset="-127"/>
-                <a:ea typeface="바탕" pitchFamily="18" charset="-127"/>
-                <a:cs typeface="+mn-cs"/>
-              </a:rPr>
-              <a:t> 감사합니다</a:t>
-            </a:r>
-            <a:r>
-              <a:rPr kumimoji="0" lang="en-US" altLang="ko-KR" sz="3200" b="1" i="0" u="none" strike="noStrike" kern="1200" cap="none" spc="0" normalizeH="0" baseline="0" noProof="0" dirty="0">
-                <a:ln>
-                  <a:noFill/>
-                </a:ln>
-                <a:solidFill>
-                  <a:srgbClr val="EEECE1">
-                    <a:lumMod val="90000"/>
-                  </a:srgbClr>
-                </a:solidFill>
-                <a:effectLst/>
-                <a:uLnTx/>
-                <a:uFillTx/>
-                <a:latin typeface="바탕" pitchFamily="18" charset="-127"/>
-                <a:ea typeface="바탕" pitchFamily="18" charset="-127"/>
-                <a:cs typeface="+mn-cs"/>
-              </a:rPr>
-              <a:t>.</a:t>
-            </a:r>
-            <a:endParaRPr kumimoji="0" lang="en-US" altLang="ko-KR" sz="3200" b="1" i="0" u="none" strike="noStrike" kern="1200" cap="none" spc="-100" normalizeH="0" baseline="0" noProof="0" dirty="0">
+              <a:t>Responsorial Psalm</a:t>
+            </a:r>
+            <a:endParaRPr kumimoji="0" lang="en-AU" sz="2000" b="0" i="0" u="none" strike="noStrike" kern="1200" cap="none" spc="0" normalizeH="0" baseline="0" noProof="0" dirty="0">
               <a:ln>
                 <a:noFill/>
               </a:ln>
               <a:solidFill>
-                <a:prstClr val="white"/>
+                <a:srgbClr val="C0504D"/>
               </a:solidFill>
               <a:effectLst/>
               <a:uLnTx/>
               <a:uFillTx/>
-              <a:latin typeface="Batang" pitchFamily="18" charset="-127"/>
-              <a:ea typeface="Batang" pitchFamily="18" charset="-127"/>
+              <a:latin typeface="Calibri"/>
+              <a:ea typeface="+mn-ea"/>
               <a:cs typeface="+mn-cs"/>
+            </a:endParaRPr>
+          </a:p>
+        </p:txBody>
+      </p:sp>
+      <p:sp>
+        <p:nvSpPr>
+          <p:cNvPr id="2" name="TextBox 1">
+            <a:extLst>
+              <a:ext uri="{FF2B5EF4-FFF2-40B4-BE49-F238E27FC236}">
+                <a16:creationId xmlns:a16="http://schemas.microsoft.com/office/drawing/2014/main" xmlns="" id="{5157316C-57D6-EBB9-91F6-145DA88765BA}"/>
+              </a:ext>
+            </a:extLst>
+          </p:cNvPr>
+          <p:cNvSpPr txBox="1"/>
+          <p:nvPr/>
+        </p:nvSpPr>
+        <p:spPr>
+          <a:xfrm>
+            <a:off x="6479260" y="4842932"/>
+            <a:ext cx="2629244" cy="215444"/>
+          </a:xfrm>
+          <a:prstGeom prst="rect">
+            <a:avLst/>
+          </a:prstGeom>
+          <a:noFill/>
+        </p:spPr>
+        <p:txBody>
+          <a:bodyPr wrap="square" lIns="0" tIns="0" rIns="0" bIns="0">
+            <a:spAutoFit/>
+          </a:bodyPr>
+          <a:lstStyle/>
+          <a:p>
+            <a:pPr algn="ctr"/>
+            <a:r>
+              <a:rPr lang="ko-KR" altLang="en-US" spc="-100" dirty="0">
+                <a:solidFill>
+                  <a:schemeClr val="bg1">
+                    <a:lumMod val="50000"/>
+                  </a:schemeClr>
+                </a:solidFill>
+                <a:latin typeface="궁서" panose="02030600000101010101" pitchFamily="18" charset="-127"/>
+                <a:ea typeface="궁서" panose="02030600000101010101" pitchFamily="18" charset="-127"/>
+              </a:rPr>
+              <a:t>전례문 © 한국천주교중앙협의회</a:t>
+            </a:r>
+          </a:p>
+        </p:txBody>
+      </p:sp>
+      <p:sp>
+        <p:nvSpPr>
+          <p:cNvPr id="4" name="object 3">
+            <a:extLst>
+              <a:ext uri="{FF2B5EF4-FFF2-40B4-BE49-F238E27FC236}">
+                <a16:creationId xmlns:a16="http://schemas.microsoft.com/office/drawing/2014/main" xmlns="" id="{F8849E71-E989-7DF3-13FE-C6AE418D96A7}"/>
+              </a:ext>
+            </a:extLst>
+          </p:cNvPr>
+          <p:cNvSpPr txBox="1">
+            <a:spLocks/>
+          </p:cNvSpPr>
+          <p:nvPr/>
+        </p:nvSpPr>
+        <p:spPr>
+          <a:xfrm>
+            <a:off x="35496" y="627534"/>
+            <a:ext cx="9001000" cy="3154710"/>
+          </a:xfrm>
+          <a:prstGeom prst="rect">
+            <a:avLst/>
+          </a:prstGeom>
+        </p:spPr>
+        <p:txBody>
+          <a:bodyPr vert="horz" wrap="square" lIns="0" tIns="0" rIns="0" bIns="0" rtlCol="0">
+            <a:spAutoFit/>
+          </a:bodyPr>
+          <a:lstStyle/>
+          <a:p>
+            <a:pPr marL="719138" indent="-719138" defTabSz="914400">
+              <a:lnSpc>
+                <a:spcPct val="100000"/>
+              </a:lnSpc>
+              <a:spcAft>
+                <a:spcPts val="4200"/>
+              </a:spcAft>
+              <a:tabLst>
+                <a:tab pos="361950" algn="l"/>
+              </a:tabLst>
+            </a:pPr>
+            <a:r>
+              <a:rPr lang="ko-KR" altLang="en-US" sz="3600" b="1" dirty="0">
+                <a:solidFill>
+                  <a:schemeClr val="bg2">
+                    <a:lumMod val="90000"/>
+                  </a:schemeClr>
+                </a:solidFill>
+                <a:latin typeface="바탕" pitchFamily="18" charset="-127"/>
+                <a:ea typeface="바탕" pitchFamily="18" charset="-127"/>
+              </a:rPr>
+              <a:t>◎	오묘하게 지어 주신 이 몸, 당신을 찬송하나이다.</a:t>
+            </a:r>
+            <a:endParaRPr lang="en-US" altLang="ko-KR" sz="3700" b="1" dirty="0">
+              <a:solidFill>
+                <a:schemeClr val="bg2">
+                  <a:lumMod val="90000"/>
+                </a:schemeClr>
+              </a:solidFill>
+              <a:latin typeface="바탕" panose="02030600000101010101" pitchFamily="18" charset="-127"/>
+              <a:ea typeface="바탕" panose="02030600000101010101" pitchFamily="18" charset="-127"/>
+            </a:endParaRPr>
+          </a:p>
+          <a:p>
+            <a:pPr marL="719138" indent="-719138" defTabSz="914400">
+              <a:lnSpc>
+                <a:spcPct val="100000"/>
+              </a:lnSpc>
+              <a:spcAft>
+                <a:spcPts val="4200"/>
+              </a:spcAft>
+              <a:tabLst>
+                <a:tab pos="361950" algn="l"/>
+              </a:tabLst>
+            </a:pPr>
+            <a:r>
+              <a:rPr lang="ko-KR" altLang="en-US" sz="3600" b="1" dirty="0">
+                <a:solidFill>
+                  <a:schemeClr val="bg1"/>
+                </a:solidFill>
+                <a:latin typeface="바탕" pitchFamily="18" charset="-127"/>
+                <a:ea typeface="바탕" pitchFamily="18" charset="-127"/>
+              </a:rPr>
+              <a:t>○	주님, 당신은 저를 살펴보시고 잘 아시나이다. 앉으나 서나 당신은 저를 아시고, 멀리서도 제 생각 알아차리시나이다. 길을 가도 누워 있어도 헤아리시니, 당신은 저의 길 모두 아시나이다. ◎</a:t>
+            </a:r>
+            <a:endParaRPr lang="en-US" altLang="ko-KR" sz="3200" b="1" dirty="0">
+              <a:solidFill>
+                <a:schemeClr val="bg1"/>
+              </a:solidFill>
+              <a:latin typeface="바탕" panose="02030600000101010101" pitchFamily="18" charset="-127"/>
+              <a:ea typeface="바탕" panose="02030600000101010101" pitchFamily="18" charset="-127"/>
             </a:endParaRPr>
           </a:p>
         </p:txBody>
